--- a/public/fun/pack/pptx/talkpro/발표템플릿프리미엄_22_교육·강의_네온아쿠아.pptx
+++ b/public/fun/pack/pptx/talkpro/발표템플릿프리미엄_22_교육·강의_네온아쿠아.pptx
@@ -115,12 +115,12 @@
   <p:extLst>
     <p:ext uri="{521415D9-36F7-43E2-AB2F-B90AF26B5E84}">
       <p14:sectionLst xmlns:p14="http://schemas.microsoft.com/office/powerpoint/2010/main">
-        <p14:section name="시작" id="{E57DEC91-676B-4EF8-86EF-9C7EDCD93E85}">
+        <p14:section name="시작" id="{4DEB28C6-3F79-44BB-9B41-3B178F820051}">
           <p14:sldIdLst>
             <p14:sldId id="256"/>
           </p14:sldIdLst>
         </p14:section>
-        <p14:section name="본문" id="{9BBAF627-713F-40EB-8342-42F95772E194}">
+        <p14:section name="본문" id="{E0BC8F9A-21DA-483F-8DB2-41EA325A7E9A}">
           <p14:sldIdLst>
             <p14:sldId id="257"/>
             <p14:sldId id="258"/>
@@ -131,7 +131,7 @@
             <p14:sldId id="263"/>
           </p14:sldIdLst>
         </p14:section>
-        <p14:section name="마무리" id="{A4607322-9178-49D8-8DF2-7FC5DD56BC28}">
+        <p14:section name="마무리" id="{6A582D5D-4522-41CE-9D5D-CBF3CA1087C1}">
           <p14:sldIdLst>
             <p14:sldId id="264"/>
           </p14:sldIdLst>
@@ -3087,7 +3087,7 @@
             </a:lvl1pPr>
           </a:lstStyle>
           <a:p>
-            <a:fld id="{DD51A903-B575-432E-8D92-E14EB44E5C8F}" type="slidenum">
+            <a:fld id="{776A5523-AF45-4325-AA0C-1C379D0EB572}" type="slidenum">
               <a:rPr lang="en-US"/>
               <a:t>‹#›</a:t>
             </a:fld>
@@ -5582,7 +5582,7 @@
             </a:lvl1pPr>
           </a:lstStyle>
           <a:p>
-            <a:fld id="{CC5DEB58-E99D-4275-A41E-87E9FE4165F2}" type="slidenum">
+            <a:fld id="{71D3AC74-ABD8-4B0A-8215-0EA1FB4F9958}" type="slidenum">
               <a:rPr lang="en-US"/>
               <a:t>‹#›</a:t>
             </a:fld>
@@ -6872,7 +6872,7 @@
             </a:lvl1pPr>
           </a:lstStyle>
           <a:p>
-            <a:fld id="{A656616C-F0A0-4C16-9EBE-AB38E8C6FE27}" type="slidenum">
+            <a:fld id="{B0A5A412-D4D7-4A6F-9E9D-89C1FC5A4B3C}" type="slidenum">
               <a:rPr lang="en-US"/>
               <a:t>‹#›</a:t>
             </a:fld>
@@ -8403,7 +8403,7 @@
           <a:p>
             <a:r>
               <a:rPr lang="ko-KR"/>
-              <a:t>0000. 00. 00</a:t>
+              <a:t>날짜 입력</a:t>
             </a:r>
           </a:p>
         </p:txBody>
@@ -8488,7 +8488,7 @@
           <a:bodyPr/>
           <a:lstStyle/>
           <a:p>
-            <a:fld id="{C3E3767E-3B15-418A-B81B-06E376486F2C}" type="slidenum">
+            <a:fld id="{08A44F62-EC15-4C68-88DC-A71C1BCF8593}" type="slidenum">
               <a:rPr lang="en-US"/>
               <a:t>‹#›</a:t>
             </a:fld>
@@ -9598,7 +9598,7 @@
           <a:bodyPr/>
           <a:lstStyle/>
           <a:p>
-            <a:fld id="{5E6A31FE-CBA2-46E7-92EB-2538F8184B10}" type="slidenum">
+            <a:fld id="{94031502-290E-4C90-B669-A0F9F9C348F2}" type="slidenum">
               <a:rPr lang="en-US"/>
               <a:t>‹#›</a:t>
             </a:fld>
@@ -9686,7 +9686,7 @@
           <a:bodyPr/>
           <a:lstStyle/>
           <a:p>
-            <a:fld id="{A07F338C-FFD3-44F1-B8E0-AE5DB7C1C157}" type="slidenum">
+            <a:fld id="{822B4F26-34EC-4D50-99EC-58B4486768A0}" type="slidenum">
               <a:rPr lang="en-US"/>
               <a:t>‹#›</a:t>
             </a:fld>
@@ -10590,7 +10590,7 @@
           <a:bodyPr/>
           <a:lstStyle/>
           <a:p>
-            <a:fld id="{0049D2C4-0DED-4C82-AA1C-022DDDA1BD71}" type="slidenum">
+            <a:fld id="{5DB5192C-6F71-4E6A-A0C9-A55CBEFFAEAC}" type="slidenum">
               <a:rPr lang="en-US"/>
               <a:t>‹#›</a:t>
             </a:fld>
@@ -11192,7 +11192,7 @@
           <a:bodyPr/>
           <a:lstStyle/>
           <a:p>
-            <a:fld id="{DC5605D6-FADD-4969-AAEA-EF50061DB53B}" type="slidenum">
+            <a:fld id="{73AFDF0E-2683-41DD-9433-76CB627298AB}" type="slidenum">
               <a:rPr lang="en-US"/>
               <a:t>‹#›</a:t>
             </a:fld>
@@ -11372,7 +11372,7 @@
           <a:bodyPr/>
           <a:lstStyle/>
           <a:p>
-            <a:fld id="{A82830B7-A0A1-4294-975A-5BEE64E92C86}" type="slidenum">
+            <a:fld id="{D9EB66CE-B7DF-46A4-8A51-16EA559A15E9}" type="slidenum">
               <a:rPr lang="en-US"/>
               <a:t>‹#›</a:t>
             </a:fld>
@@ -12436,7 +12436,7 @@
           <a:bodyPr/>
           <a:lstStyle/>
           <a:p>
-            <a:fld id="{A77E1881-C3C9-4776-A1AB-0A10A17FA8B9}" type="slidenum">
+            <a:fld id="{2F0A3802-7048-483A-80FC-8058B29E7289}" type="slidenum">
               <a:rPr lang="en-US"/>
               <a:t>‹#›</a:t>
             </a:fld>
